--- a/site/clases/parte-2-deep-learning/168-despliegue-en-vertex-ai/clase-168-despliegue-en-vertex-ai-presentacion.pptx
+++ b/site/clases/parte-2-deep-learning/168-despliegue-en-vertex-ai/clase-168-despliegue-en-vertex-ai-presentacion.pptx
@@ -3272,7 +3272,7 @@
                 </a:solidFill>
                 <a:latin typeface="Segoe UI"/>
               </a:rPr>
-              <a:t>Parte: 2 — Deep Learning · Fuente: Géron, cap. 19 § Deploying a Model to Vertex AI + docs Vertex AI.  Duración estimada: 60 min.</a:t>
+              <a:t>Parte: 2 — Deep Learning · Fuente: Géron, cap. 19 § Deploying a Model to Vertex AI + docs Vertex AI.  Duración estimada: 60 min. · Nivel: Avanzado</a:t>
             </a:r>
           </a:p>
         </p:txBody>
@@ -3581,7 +3581,7 @@
                 </a:solidFill>
                 <a:latin typeface="Segoe UI"/>
               </a:rPr>
-              <a:t>Parte: 2 — Deep Learning · Fuente: Géron, cap. 19 § Deploying a Model to Vertex AI + docs Vertex AI.  Duración estimada: 60 min.</a:t>
+              <a:t>Parte: 2 — Deep Learning · Fuente: Géron, cap. 19 § Deploying a Model to Vertex AI + docs Vertex AI.  Duración estimada: 60 min. · Nivel: Avanzado</a:t>
             </a:r>
           </a:p>
         </p:txBody>
@@ -4888,7 +4888,387 @@
                 </a:solidFill>
                 <a:latin typeface="Courier New"/>
               </a:rPr>
-              <a:t># Imports y configuración inicial</a:t>
+              <a:t>try:</a:t>
+            </a:r>
+          </a:p>
+          <a:p>
+            <a:pPr>
+              <a:defRPr sz="1200" b="0">
+                <a:solidFill>
+                  <a:srgbClr val="F8FAFC"/>
+                </a:solidFill>
+                <a:latin typeface="Courier New"/>
+              </a:defRPr>
+            </a:pPr>
+            <a:r>
+              <a:rPr sz="1200" b="0">
+                <a:solidFill>
+                  <a:srgbClr val="F8FAFC"/>
+                </a:solidFill>
+                <a:latin typeface="Courier New"/>
+              </a:rPr>
+              <a:t>    from google.cloud import aiplatform</a:t>
+            </a:r>
+          </a:p>
+          <a:p>
+            <a:pPr>
+              <a:defRPr sz="1200" b="0">
+                <a:solidFill>
+                  <a:srgbClr val="F8FAFC"/>
+                </a:solidFill>
+                <a:latin typeface="Courier New"/>
+              </a:defRPr>
+            </a:pPr>
+            <a:r>
+              <a:rPr sz="1200" b="0">
+                <a:solidFill>
+                  <a:srgbClr val="F8FAFC"/>
+                </a:solidFill>
+                <a:latin typeface="Courier New"/>
+              </a:rPr>
+              <a:t>    GCP_OK = True</a:t>
+            </a:r>
+          </a:p>
+          <a:p>
+            <a:pPr>
+              <a:defRPr sz="1200" b="0">
+                <a:solidFill>
+                  <a:srgbClr val="F8FAFC"/>
+                </a:solidFill>
+                <a:latin typeface="Courier New"/>
+              </a:defRPr>
+            </a:pPr>
+            <a:r>
+              <a:rPr sz="1200" b="0">
+                <a:solidFill>
+                  <a:srgbClr val="F8FAFC"/>
+                </a:solidFill>
+                <a:latin typeface="Courier New"/>
+              </a:rPr>
+              <a:t>except Exception:</a:t>
+            </a:r>
+          </a:p>
+          <a:p>
+            <a:pPr>
+              <a:defRPr sz="1200" b="0">
+                <a:solidFill>
+                  <a:srgbClr val="F8FAFC"/>
+                </a:solidFill>
+                <a:latin typeface="Courier New"/>
+              </a:defRPr>
+            </a:pPr>
+            <a:r>
+              <a:rPr sz="1200" b="0">
+                <a:solidFill>
+                  <a:srgbClr val="F8FAFC"/>
+                </a:solidFill>
+                <a:latin typeface="Courier New"/>
+              </a:rPr>
+              <a:t>    GCP_OK = False</a:t>
+            </a:r>
+          </a:p>
+          <a:p>
+            <a:pPr>
+              <a:defRPr sz="1200" b="0">
+                <a:solidFill>
+                  <a:srgbClr val="F8FAFC"/>
+                </a:solidFill>
+                <a:latin typeface="Courier New"/>
+              </a:defRPr>
+            </a:pPr>
+            <a:r>
+              <a:rPr sz="1200" b="0">
+                <a:solidFill>
+                  <a:srgbClr val="F8FAFC"/>
+                </a:solidFill>
+                <a:latin typeface="Courier New"/>
+              </a:rPr>
+              <a:t>    print("google-cloud-aiplatform no instalado -&gt; se muestra la API (no se ejecuta)")</a:t>
+            </a:r>
+          </a:p>
+          <a:p>
+            <a:pPr>
+              <a:defRPr sz="1200" b="0">
+                <a:solidFill>
+                  <a:srgbClr val="F8FAFC"/>
+                </a:solidFill>
+                <a:latin typeface="Courier New"/>
+              </a:defRPr>
+            </a:pPr>
+            <a:r>
+              <a:rPr sz="1200" b="0">
+                <a:solidFill>
+                  <a:srgbClr val="F8FAFC"/>
+                </a:solidFill>
+                <a:latin typeface="Courier New"/>
+              </a:rPr>
+              <a:t> </a:t>
+            </a:r>
+          </a:p>
+          <a:p>
+            <a:pPr>
+              <a:defRPr sz="1200" b="0">
+                <a:solidFill>
+                  <a:srgbClr val="F8FAFC"/>
+                </a:solidFill>
+                <a:latin typeface="Courier New"/>
+              </a:defRPr>
+            </a:pPr>
+            <a:r>
+              <a:rPr sz="1200" b="0">
+                <a:solidFill>
+                  <a:srgbClr val="F8FAFC"/>
+                </a:solidFill>
+                <a:latin typeface="Courier New"/>
+              </a:rPr>
+              <a:t>PROJECT, REGION, BUCKET = "mi-proyecto", "us-central1", "gs://mi-bucket/fashion"</a:t>
+            </a:r>
+          </a:p>
+          <a:p>
+            <a:pPr>
+              <a:defRPr sz="1200" b="0">
+                <a:solidFill>
+                  <a:srgbClr val="F8FAFC"/>
+                </a:solidFill>
+                <a:latin typeface="Courier New"/>
+              </a:defRPr>
+            </a:pPr>
+            <a:r>
+              <a:rPr sz="1200" b="0">
+                <a:solidFill>
+                  <a:srgbClr val="F8FAFC"/>
+                </a:solidFill>
+                <a:latin typeface="Courier New"/>
+              </a:rPr>
+              <a:t> </a:t>
+            </a:r>
+          </a:p>
+          <a:p>
+            <a:pPr>
+              <a:defRPr sz="1200" b="0">
+                <a:solidFill>
+                  <a:srgbClr val="F8FAFC"/>
+                </a:solidFill>
+                <a:latin typeface="Courier New"/>
+              </a:defRPr>
+            </a:pPr>
+            <a:r>
+              <a:rPr sz="1200" b="0">
+                <a:solidFill>
+                  <a:srgbClr val="F8FAFC"/>
+                </a:solidFill>
+                <a:latin typeface="Courier New"/>
+              </a:rPr>
+              <a:t>if GCP_OK:</a:t>
+            </a:r>
+          </a:p>
+          <a:p>
+            <a:pPr>
+              <a:defRPr sz="1200" b="0">
+                <a:solidFill>
+                  <a:srgbClr val="F8FAFC"/>
+                </a:solidFill>
+                <a:latin typeface="Courier New"/>
+              </a:defRPr>
+            </a:pPr>
+            <a:r>
+              <a:rPr sz="1200" b="0">
+                <a:solidFill>
+                  <a:srgbClr val="F8FAFC"/>
+                </a:solidFill>
+                <a:latin typeface="Courier New"/>
+              </a:rPr>
+              <a:t>    aiplatform.init(project=PROJECT, location=REGION, staging_bucket=BUCKET)</a:t>
+            </a:r>
+          </a:p>
+          <a:p>
+            <a:pPr>
+              <a:defRPr sz="1200" b="0">
+                <a:solidFill>
+                  <a:srgbClr val="F8FAFC"/>
+                </a:solidFill>
+                <a:latin typeface="Courier New"/>
+              </a:defRPr>
+            </a:pPr>
+            <a:r>
+              <a:rPr sz="1200" b="0">
+                <a:solidFill>
+                  <a:srgbClr val="F8FAFC"/>
+                </a:solidFill>
+                <a:latin typeface="Courier New"/>
+              </a:rPr>
+              <a:t>    model = aiplatform.Model.upload(</a:t>
+            </a:r>
+          </a:p>
+          <a:p>
+            <a:pPr>
+              <a:defRPr sz="1200" b="0">
+                <a:solidFill>
+                  <a:srgbClr val="F8FAFC"/>
+                </a:solidFill>
+                <a:latin typeface="Courier New"/>
+              </a:defRPr>
+            </a:pPr>
+            <a:r>
+              <a:rPr sz="1200" b="0">
+                <a:solidFill>
+                  <a:srgbClr val="F8FAFC"/>
+                </a:solidFill>
+                <a:latin typeface="Courier New"/>
+              </a:rPr>
+              <a:t>        display_name="fashion-mnist",</a:t>
+            </a:r>
+          </a:p>
+          <a:p>
+            <a:pPr>
+              <a:defRPr sz="1200" b="0">
+                <a:solidFill>
+                  <a:srgbClr val="F8FAFC"/>
+                </a:solidFill>
+                <a:latin typeface="Courier New"/>
+              </a:defRPr>
+            </a:pPr>
+            <a:r>
+              <a:rPr sz="1200" b="0">
+                <a:solidFill>
+                  <a:srgbClr val="F8FAFC"/>
+                </a:solidFill>
+                <a:latin typeface="Courier New"/>
+              </a:rPr>
+              <a:t>        artifact_uri=BUCKET,                                   # SavedModel en GCS</a:t>
+            </a:r>
+          </a:p>
+          <a:p>
+            <a:pPr>
+              <a:defRPr sz="1200" b="0">
+                <a:solidFill>
+                  <a:srgbClr val="F8FAFC"/>
+                </a:solidFill>
+                <a:latin typeface="Courier New"/>
+              </a:defRPr>
+            </a:pPr>
+            <a:r>
+              <a:rPr sz="1200" b="0">
+                <a:solidFill>
+                  <a:srgbClr val="F8FAFC"/>
+                </a:solidFill>
+                <a:latin typeface="Courier New"/>
+              </a:rPr>
+              <a:t>        serving_container_image_uri=(</a:t>
+            </a:r>
+          </a:p>
+          <a:p>
+            <a:pPr>
+              <a:defRPr sz="1200" b="0">
+                <a:solidFill>
+                  <a:srgbClr val="F8FAFC"/>
+                </a:solidFill>
+                <a:latin typeface="Courier New"/>
+              </a:defRPr>
+            </a:pPr>
+            <a:r>
+              <a:rPr sz="1200" b="0">
+                <a:solidFill>
+                  <a:srgbClr val="F8FAFC"/>
+                </a:solidFill>
+                <a:latin typeface="Courier New"/>
+              </a:rPr>
+              <a:t>            "us-docker.pkg.dev/vertex-ai/prediction/tf2-cpu.2-15:latest"</a:t>
+            </a:r>
+          </a:p>
+          <a:p>
+            <a:pPr>
+              <a:defRPr sz="1200" b="0">
+                <a:solidFill>
+                  <a:srgbClr val="F8FAFC"/>
+                </a:solidFill>
+                <a:latin typeface="Courier New"/>
+              </a:defRPr>
+            </a:pPr>
+            <a:r>
+              <a:rPr sz="1200" b="0">
+                <a:solidFill>
+                  <a:srgbClr val="F8FAFC"/>
+                </a:solidFill>
+                <a:latin typeface="Courier New"/>
+              </a:rPr>
+              <a:t>        ),</a:t>
+            </a:r>
+          </a:p>
+          <a:p>
+            <a:pPr>
+              <a:defRPr sz="1200" b="0">
+                <a:solidFill>
+                  <a:srgbClr val="F8FAFC"/>
+                </a:solidFill>
+                <a:latin typeface="Courier New"/>
+              </a:defRPr>
+            </a:pPr>
+            <a:r>
+              <a:rPr sz="1200" b="0">
+                <a:solidFill>
+                  <a:srgbClr val="F8FAFC"/>
+                </a:solidFill>
+                <a:latin typeface="Courier New"/>
+              </a:rPr>
+              <a:t>    )</a:t>
+            </a:r>
+          </a:p>
+          <a:p>
+            <a:pPr>
+              <a:defRPr sz="1200" b="0">
+                <a:solidFill>
+                  <a:srgbClr val="F8FAFC"/>
+                </a:solidFill>
+                <a:latin typeface="Courier New"/>
+              </a:defRPr>
+            </a:pPr>
+            <a:r>
+              <a:rPr sz="1200" b="0">
+                <a:solidFill>
+                  <a:srgbClr val="F8FAFC"/>
+                </a:solidFill>
+                <a:latin typeface="Courier New"/>
+              </a:rPr>
+              <a:t>    print("modelo subido:", model.resource_name)</a:t>
+            </a:r>
+          </a:p>
+          <a:p>
+            <a:pPr>
+              <a:defRPr sz="1200" b="0">
+                <a:solidFill>
+                  <a:srgbClr val="F8FAFC"/>
+                </a:solidFill>
+                <a:latin typeface="Courier New"/>
+              </a:defRPr>
+            </a:pPr>
+            <a:r>
+              <a:rPr sz="1200" b="0">
+                <a:solidFill>
+                  <a:srgbClr val="F8FAFC"/>
+                </a:solidFill>
+                <a:latin typeface="Courier New"/>
+              </a:rPr>
+              <a:t>else:</a:t>
+            </a:r>
+          </a:p>
+          <a:p>
+            <a:pPr>
+              <a:defRPr sz="1200" b="0">
+                <a:solidFill>
+                  <a:srgbClr val="F8FAFC"/>
+                </a:solidFill>
+                <a:latin typeface="Courier New"/>
+              </a:defRPr>
+            </a:pPr>
+            <a:r>
+              <a:rPr sz="1200" b="0">
+                <a:solidFill>
+                  <a:srgbClr val="F8FAFC"/>
+                </a:solidFill>
+                <a:latin typeface="Courier New"/>
+              </a:rPr>
+              <a:t># ... (truncado)</a:t>
             </a:r>
           </a:p>
         </p:txBody>
